--- a/docs/DaoTao/Buoi10_DongGoiTrienKhai.pptx
+++ b/docs/DaoTao/Buoi10_DongGoiTrienKhai.pptx
@@ -605,7 +605,7 @@
           </a:p>
           <a:p>
             <a:r>
-              <a:t>- Tự kiểm bằng checklist trước triển khai</a:t>
+              <a:t>- Tự kiểm tra bằng checklist trước khi triển khai</a:t>
             </a:r>
           </a:p>
           <a:p>
@@ -700,27 +700,27 @@
           <a:lstStyle/>
           <a:p>
             <a:r>
-              <a:t>Note (New) (Ctrl+Shift+4): mỗi yêu cầu là một mục. Sync yêu cầu để kéo yêu cầu của bạn từ FSG, hoặc New Request.</a:t>
-            </a:r>
-          </a:p>
-          <a:p>
-            <a:r>
-              <a:t>Khai: Gen All (tên controller — Bcode tự lấy đủ file và script menu), File Path (file lẻ), SQL Object (procedure / function, chọn App / Sys), SQL Top Script (chạy trước, vd tạo bảng), Bottom Script (chạy sau, vd menu), Table liên quan (cấu trúc / dữ liệu).</a:t>
-            </a:r>
-          </a:p>
-          <a:p>
-            <a:r>
-              <a:t>Xem trước gói, mở tất cả script để rà, rồi Generate Update.</a:t>
-            </a:r>
-          </a:p>
-          <a:p>
-            <a:r>
-              <a:t>BcodeNote.exe làm cùng việc nhưng chuyển được nhiều dự án; chọn menu ở cây trái → Gợi ý cho y/c đang mở → tick → Điền vào y/c.</a:t>
-            </a:r>
-          </a:p>
-          <a:p>
-            <a:r>
-              <a:t>Gen Update (Ctrl+Shift+G) đóng gói nhanh không theo yêu cầu. Gói gồm Script\app\APP_Script.sql, Script\sys\SYS_Script.sql, Web\..., description.txt. Table không bao giờ bị DROP.</a:t>
+              <a:t>Note (New) (Ctrl+Shift+4): mỗi yêu cầu là một mục. Bấm Sync yêu cầu để kéo các yêu cầu được giao cho bạn từ FSG về, hoặc bấm New Request để tự tạo.</a:t>
+            </a:r>
+          </a:p>
+          <a:p>
+            <a:r>
+              <a:t>Trong mỗi yêu cầu khai báo: Gen All (nhập tên controller — Bcode tự lấy đủ các file và script menu liên quan), File Path (thêm từng file lẻ), SQL Object (procedure / function, chọn database App hoặc Sys), SQL Top Script (script chạy trước, ví dụ tạo bảng), Bottom Script (script chạy sau, ví dụ thêm menu), Table liên quan (lấy cấu trúc hoặc dữ liệu bảng).</a:t>
+            </a:r>
+          </a:p>
+          <a:p>
+            <a:r>
+              <a:t>Xem trước gói, mở tất cả script ra để rà lại, rồi bấm Generate Update.</a:t>
+            </a:r>
+          </a:p>
+          <a:p>
+            <a:r>
+              <a:t>BcodeNote.exe làm cùng việc này nhưng chuyển qua lại được nhiều dự án; cách dùng: chọn menu ở cây bên trái → Gợi ý cho yêu cầu đang mở → tick các mục cần lấy → Điền vào yêu cầu.</a:t>
+            </a:r>
+          </a:p>
+          <a:p>
+            <a:r>
+              <a:t>Gen Update (Ctrl+Shift+G) đóng gói nhanh, không gắn với yêu cầu nào. Gói update gồm Script\app\APP_Script.sql, Script\sys\SYS_Script.sql, thư mục Web\... và file description.txt. Bảng (Table) trong gói không bao giờ bị DROP.</a:t>
             </a:r>
           </a:p>
         </p:txBody>
@@ -790,32 +790,32 @@
           <a:lstStyle/>
           <a:p>
             <a:r>
-              <a:t>Thứ tự triển khai: sao lưu trước (file sẽ ghi đè, định nghĩa procedure cũ làm script rollback, có thể backup database bằng Settings → Backup Database).</a:t>
-            </a:r>
-          </a:p>
-          <a:p>
-            <a:r>
-              <a:t>Chạy SYS_Script trên Sys Data, APP_Script trên App Data — đọc tab Message, có lỗi thì dừng lại.</a:t>
-            </a:r>
-          </a:p>
-          <a:p>
-            <a:r>
-              <a:t>Chép thư mục Web đè vào site, giữ đúng cấu trúc.</a:t>
-            </a:r>
-          </a:p>
-          <a:p>
-            <a:r>
-              <a:t>Đổi cấu trúc bảng thì Actions → Clear Structure App; cần nạp lại site thì Refresh Web.config.</a:t>
-            </a:r>
-          </a:p>
-          <a:p>
-            <a:r>
-              <a:t>Cuối cùng mở menu trên web kiểm tra: thêm, sửa, xoá, in, xuất Excel; ghi chú kết quả vào yêu cầu.</a:t>
-            </a:r>
-          </a:p>
-          <a:p>
-            <a:r>
-              <a:t>Quy trình cụ thể (ai được chép file lên server khách, giờ nào) theo quy định từng dự án.</a:t>
+              <a:t>Thứ tự triển khai: sao lưu trước — các file sẽ bị ghi đè, định nghĩa procedure cũ (dùng làm script rollback); có thể backup cả database bằng Settings → Backup Database.</a:t>
+            </a:r>
+          </a:p>
+          <a:p>
+            <a:r>
+              <a:t>Chạy SYS_Script trên Sys Data, APP_Script trên App Data — đọc kỹ tab Message, có lỗi thì dừng lại, không chạy tiếp.</a:t>
+            </a:r>
+          </a:p>
+          <a:p>
+            <a:r>
+              <a:t>Chép thư mục Web đè vào thư mục site, giữ đúng cấu trúc thư mục.</a:t>
+            </a:r>
+          </a:p>
+          <a:p>
+            <a:r>
+              <a:t>Nếu có đổi cấu trúc bảng thì chạy Actions → Clear Structure App; cần nạp lại site thì dùng Refresh Web.config.</a:t>
+            </a:r>
+          </a:p>
+          <a:p>
+            <a:r>
+              <a:t>Cuối cùng mở menu trên web để kiểm tra: thêm, sửa, xoá, in, xuất Excel; ghi chú kết quả kiểm tra vào yêu cầu.</a:t>
+            </a:r>
+          </a:p>
+          <a:p>
+            <a:r>
+              <a:t>Quy trình cụ thể (ai được chép file lên server của khách, vào giờ nào) theo quy định riêng của từng dự án.</a:t>
             </a:r>
           </a:p>
         </p:txBody>
@@ -885,12 +885,12 @@
           <a:lstStyle/>
           <a:p>
             <a:r>
-              <a:t>Checklist này nên in ra hoặc dán vào Note của mỗi yêu cầu. Mục 2 và 3 là quan trọng nhất: luôn có đường lui (rollback) và script phải chạy lại được nhiều lần (dùng IF OBJECT_ID ... IS NULL, IF COL_LENGTH ... IS NULL).</a:t>
-            </a:r>
-          </a:p>
-          <a:p>
-            <a:r>
-              <a:t>Mục 8: repo / tài liệu / tin nhắn không bao giờ chứa mật khẩu hay chuỗi kết nối thật.</a:t>
+              <a:t>Checklist này nên in ra hoặc dán vào Note của mỗi yêu cầu. Mục 2 và 3 quan trọng nhất: luôn phải có đường lui (rollback), và script phải chạy lại được nhiều lần mà không lỗi (dùng IF OBJECT_ID ... IS NULL, IF COL_LENGTH ... IS NULL để kiểm tra trước khi tạo).</a:t>
+            </a:r>
+          </a:p>
+          <a:p>
+            <a:r>
+              <a:t>Mục 8: repo, tài liệu và tin nhắn không bao giờ được chứa mật khẩu hay chuỗi kết nối thật.</a:t>
             </a:r>
           </a:p>
         </p:txBody>
@@ -960,17 +960,17 @@
           <a:lstStyle/>
           <a:p>
             <a:r>
-              <a:t>Bảng phím tắt hay dùng nhất. Bảng đầy đủ trong tài liệu Word phụ lục A và trong tab Trợ giúp.</a:t>
-            </a:r>
-          </a:p>
-          <a:p>
-            <a:r>
-              <a:t>BcodeViewer: Ctrl+P mở file, F12 / Ctrl+F12 entity, Shift+F12 nơi dùng, Ctrl+G Go to, Ctrl+Shift+M Problems, Alt+P xem trước Dir, Ctrl+Enter chạy SQL, F5 chạy menu, Ctrl+Shift+H lịch sử file.</a:t>
-            </a:r>
-          </a:p>
-          <a:p>
-            <a:r>
-              <a:t>Mọi phím đều đổi được: Bcode Settings → Giao diện (Template) → Phím tắt; BcodeViewer File → Phím tắt.</a:t>
+              <a:t>Đây là các phím tắt hay dùng nhất. Bảng đầy đủ có trong phụ lục A của tài liệu Word và trong tab Trợ giúp.</a:t>
+            </a:r>
+          </a:p>
+          <a:p>
+            <a:r>
+              <a:t>Phím tắt của BcodeViewer: Ctrl+P mở file, F12 / Ctrl+F12 xem entity và mở nơi khai báo, Shift+F12 tìm nơi dùng, Ctrl+G để Go to, Ctrl+Shift+M mở bảng Problems, Alt+P xem trước form Dir, Ctrl+Enter chạy SQL, F5 chạy menu, Ctrl+Shift+H xem lịch sử file.</a:t>
+            </a:r>
+          </a:p>
+          <a:p>
+            <a:r>
+              <a:t>Mọi phím tắt đều đổi được: trong Bcode vào Settings → Giao diện (Template) → Phím tắt; trong BcodeViewer vào File → Phím tắt.</a:t>
             </a:r>
           </a:p>
         </p:txBody>
@@ -1040,12 +1040,12 @@
           <a:lstStyle/>
           <a:p>
             <a:r>
-              <a:t>Ôn tập ba phần của khoá học trước bài kiểm tra cuối khoá.</a:t>
-            </a:r>
-          </a:p>
-          <a:p>
-            <a:r>
-              <a:t>Bài kiểm tra: nhận một yêu cầu trọn gói (danh mục + báo cáo + mẫu in), làm trên dự án thử và đóng gói trong một ngày; người hướng dẫn chấm theo checklist phụ lục B.</a:t>
+              <a:t>Ôn lại ba phần của khoá học (cơ bản, trung cấp, nâng cao) trước bài kiểm tra cuối khoá.</a:t>
+            </a:r>
+          </a:p>
+          <a:p>
+            <a:r>
+              <a:t>Bài kiểm tra: mỗi người nhận một yêu cầu trọn gói (danh mục + báo cáo + mẫu in), làm trên dự án thử và đóng gói xong trong một ngày; người hướng dẫn chấm điểm theo checklist ở phụ lục B.</a:t>
             </a:r>
           </a:p>
         </p:txBody>
@@ -1120,7 +1120,7 @@
           </a:p>
           <a:p>
             <a:r>
-              <a:t>Bài tập về nhà: Bài kiểm tra cuối khoá: nhận 1 yêu cầu trọn gói (danh mục + báo cáo + mẫu in), làm và đóng gói trong 1 ngày.</a:t>
+              <a:t>Bài tập về nhà: Bài kiểm tra cuối khoá: nhận 1 yêu cầu trọn gói (gồm danh mục, báo cáo và mẫu in), làm và đóng gói trong 1 ngày.</a:t>
             </a:r>
           </a:p>
         </p:txBody>
@@ -1200,12 +1200,12 @@
           </a:p>
           <a:p>
             <a:r>
-              <a:t>2. SYS_Script.sql → Sys Data, APP_Script.sql → App Data.</a:t>
-            </a:r>
-          </a:p>
-          <a:p>
-            <a:r>
-              <a:t>3. Actions → Clear Structure App (site còn giữ cấu trúc cũ).</a:t>
+              <a:t>2. SYS_Script.sql chạy trên Sys Data, APP_Script.sql chạy trên App Data.</a:t>
+            </a:r>
+          </a:p>
+          <a:p>
+            <a:r>
+              <a:t>3. Chạy Actions → Clear Structure App, vì site còn giữ cấu trúc bảng cũ.</a:t>
             </a:r>
           </a:p>
         </p:txBody>
@@ -4822,7 +4822,7 @@
                 <a:ea typeface="Segoe UI"/>
                 <a:cs typeface="Segoe UI"/>
               </a:rPr>
-              <a:t>Tự kiểm bằng checklist trước triển khai</a:t>
+              <a:t>Tự kiểm tra bằng checklist trước khi triển khai</a:t>
             </a:r>
           </a:p>
         </p:txBody>
@@ -5767,7 +5767,7 @@
                 <a:ea typeface="Segoe UI"/>
                 <a:cs typeface="Segoe UI"/>
               </a:rPr>
-              <a:t> trước · </a:t>
+              <a:t> chạy trước · </a:t>
             </a:r>
             <a:r>
               <a:rPr sz="1500" b="1" i="0">
@@ -5887,7 +5887,7 @@
                 <a:ea typeface="Segoe UI"/>
                 <a:cs typeface="Segoe UI"/>
               </a:rPr>
-              <a:t>BcodeNote: nhiều dự án</a:t>
+              <a:t>BcodeNote: làm nhiều dự án</a:t>
             </a:r>
           </a:p>
           <a:p>
@@ -6316,7 +6316,7 @@
                 <a:ea typeface="Segoe UI"/>
                 <a:cs typeface="Segoe UI"/>
               </a:rPr>
-              <a:t>file sẽ ghi đè,</a:t>
+              <a:t>file sẽ bị ghi đè,</a:t>
             </a:r>
           </a:p>
           <a:p>
@@ -6330,7 +6330,7 @@
                 <a:ea typeface="Segoe UI"/>
                 <a:cs typeface="Segoe UI"/>
               </a:rPr>
-              <a:t>procedure cũ, DB</a:t>
+              <a:t>procedure cũ, database</a:t>
             </a:r>
           </a:p>
         </p:txBody>
@@ -6493,7 +6493,7 @@
                 <a:ea typeface="Segoe UI"/>
                 <a:cs typeface="Segoe UI"/>
               </a:rPr>
-              <a:t>SYS_Script.sql</a:t>
+              <a:t>chạy SYS_Script.sql</a:t>
             </a:r>
           </a:p>
           <a:p>
@@ -6670,7 +6670,7 @@
                 <a:ea typeface="Segoe UI"/>
                 <a:cs typeface="Segoe UI"/>
               </a:rPr>
-              <a:t>APP_Script.sql</a:t>
+              <a:t>chạy APP_Script.sql</a:t>
             </a:r>
           </a:p>
           <a:p>
@@ -7112,7 +7112,7 @@
                 <a:ea typeface="Segoe UI"/>
                 <a:cs typeface="Segoe UI"/>
               </a:rPr>
-              <a:t> sau mỗi script — có lỗi thì dừng.</a:t>
+              <a:t> sau mỗi script — có lỗi thì dừng lại.</a:t>
             </a:r>
           </a:p>
           <a:p>
@@ -7325,7 +7325,7 @@
                 <a:ea typeface="Segoe UI"/>
                 <a:cs typeface="Segoe UI"/>
               </a:rPr>
-              <a:t> Ai được chép file / chạy script trên server khách, vào giờ nào — theo quy định từng dự án.</a:t>
+              <a:t> Ai được chép file, chạy script trên server khách, vào giờ nào — theo quy định của từng dự án.</a:t>
             </a:r>
           </a:p>
         </p:txBody>
@@ -7738,7 +7738,7 @@
                           <a:ea typeface="Segoe UI"/>
                           <a:cs typeface="Segoe UI"/>
                         </a:rPr>
-                        <a:t>Đã sao lưu: file sẽ ghi đè, procedure cũ (rollback), dữ liệu sẽ sửa</a:t>
+                        <a:t>Đã sao lưu: file sẽ bị ghi đè, procedure cũ (để rollback), dữ liệu sẽ sửa</a:t>
                       </a:r>
                     </a:p>
                   </a:txBody>
@@ -7810,7 +7810,7 @@
                           <a:ea typeface="Segoe UI"/>
                           <a:cs typeface="Segoe UI"/>
                         </a:rPr>
-                        <a:t> dữ liệu; UPDATE/DELETE có WHERE</a:t>
+                        <a:t> bảng dữ liệu; UPDATE/DELETE có WHERE</a:t>
                       </a:r>
                     </a:p>
                   </a:txBody>
@@ -7954,7 +7954,7 @@
                           <a:ea typeface="Segoe UI"/>
                           <a:cs typeface="Segoe UI"/>
                         </a:rPr>
-                        <a:t>Bảng phân kỳ: thêm cột cho mọi kỳ, Check Partitions Struct sạch</a:t>
+                        <a:t>Bảng phân kỳ: đã thêm cột cho mọi kỳ, Check Partitions Struct không báo lỗi</a:t>
                       </a:r>
                     </a:p>
                   </a:txBody>
@@ -8004,7 +8004,7 @@
                           <a:ea typeface="Segoe UI"/>
                           <a:cs typeface="Segoe UI"/>
                         </a:rPr>
-                        <a:t>Problems sạch, không file đỏ; tiêu đề v/e đủ; menu + quyền</a:t>
+                        <a:t>Problems không lỗi, không file đỏ; đủ tiêu đề v/e; có menu và phân quyền</a:t>
                       </a:r>
                     </a:p>
                   </a:txBody>
@@ -8065,7 +8065,7 @@
                           <a:ea typeface="Segoe UI"/>
                           <a:cs typeface="Segoe UI"/>
                         </a:rPr>
-                        <a:t> ghi mã yêu cầu, nội dung, người làm, ngày</a:t>
+                        <a:t> ghi mã yêu cầu, nội dung, người làm, ngày làm</a:t>
                       </a:r>
                     </a:p>
                   </a:txBody>
@@ -8115,7 +8115,7 @@
                           <a:ea typeface="Segoe UI"/>
                           <a:cs typeface="Segoe UI"/>
                         </a:rPr>
-                        <a:t>Không đưa mật khẩu, chuỗi kết nối, dữ liệu khách vào gói / tài liệu</a:t>
+                        <a:t>Không đưa mật khẩu, chuỗi kết nối, dữ liệu khách vào gói hay tài liệu</a:t>
                       </a:r>
                     </a:p>
                   </a:txBody>
@@ -8684,7 +8684,7 @@
                           <a:ea typeface="Segoe UI"/>
                           <a:cs typeface="Segoe UI"/>
                         </a:rPr>
-                        <a:t>App ↔ Sys</a:t>
+                        <a:t>Đổi App ↔ Sys</a:t>
                       </a:r>
                     </a:p>
                   </a:txBody>
@@ -8804,7 +8804,7 @@
                           <a:ea typeface="Segoe UI"/>
                           <a:cs typeface="Segoe UI"/>
                         </a:rPr>
-                        <a:t>Chạy · huỷ</a:t>
+                        <a:t>Chạy · dừng</a:t>
                       </a:r>
                     </a:p>
                   </a:txBody>
@@ -8876,7 +8876,7 @@
                           <a:ea typeface="Segoe UI"/>
                           <a:cs typeface="Segoe UI"/>
                         </a:rPr>
-                        <a:t>Xem object · AI SQL</a:t>
+                        <a:t>Xem object · AI viết SQL</a:t>
                       </a:r>
                     </a:p>
                   </a:txBody>
@@ -10216,7 +10216,7 @@
                 <a:ea typeface="Segoe UI"/>
                 <a:cs typeface="Segoe UI"/>
               </a:rPr>
-              <a:t>Sửa dữ liệu </a:t>
+              <a:t>Sửa dữ liệu theo </a:t>
             </a:r>
             <a:r>
               <a:rPr sz="1600" b="1" i="0">
@@ -10466,7 +10466,7 @@
                 <a:ea typeface="Segoe UI"/>
                 <a:cs typeface="Segoe UI"/>
               </a:rPr>
-              <a:t>Báo cáo: Filter → proc → Grid → Report</a:t>
+              <a:t>Báo cáo: Filter → procedure → Grid → Report</a:t>
             </a:r>
           </a:p>
           <a:p>
@@ -10767,7 +10767,7 @@
                 <a:ea typeface="Segoe UI"/>
                 <a:cs typeface="Segoe UI"/>
               </a:rPr>
-              <a:t>Bắt lỗi </a:t>
+              <a:t>Bắt lỗi theo </a:t>
             </a:r>
             <a:r>
               <a:rPr sz="1600" b="1" i="0">
@@ -11095,7 +11095,7 @@
                 <a:ea typeface="Segoe UI"/>
                 <a:cs typeface="Segoe UI"/>
               </a:rPr>
-              <a:t> Đóng gói danh mục (buổi 5), báo cáo (buổi 6), mẫu in (buổi 7), procedure (buổi 8) thành các yêu cầu trong Note (New), Generate Update.</a:t>
+              <a:t> Đóng gói danh mục (buổi 5), báo cáo (buổi 6), mẫu in (buổi 7), procedure (buổi 8) thành các yêu cầu trong Note (New), rồi chạy Generate Update.</a:t>
             </a:r>
           </a:p>
           <a:p>
@@ -11135,7 +11135,7 @@
                 <a:ea typeface="Segoe UI"/>
                 <a:cs typeface="Segoe UI"/>
               </a:rPr>
-              <a:t> Triển khai gói lên một bản sao khác, chạy checklist, thử rollback procedure.</a:t>
+              <a:t> Triển khai gói lên một bản sao database khác, chạy checklist và thử rollback procedure.</a:t>
             </a:r>
           </a:p>
         </p:txBody>
@@ -11481,7 +11481,7 @@
                 <a:ea typeface="Segoe UI"/>
                 <a:cs typeface="Segoe UI"/>
               </a:rPr>
-              <a:t> Bài kiểm tra cuối khoá: nhận 1 yêu cầu trọn gói (danh mục + báo cáo + mẫu in), làm và đóng gói trong 1 ngày.</a:t>
+              <a:t> Bài kiểm tra cuối khoá: nhận 1 yêu cầu trọn gói (gồm danh mục, báo cáo và mẫu in), làm và đóng gói trong 1 ngày.</a:t>
             </a:r>
           </a:p>
         </p:txBody>
@@ -11769,7 +11769,7 @@
                 <a:ea typeface="Segoe UI"/>
                 <a:cs typeface="Segoe UI"/>
               </a:rPr>
-              <a:t> Gói update gồm những thư mục nào?</a:t>
+              <a:t> Gói update gồm những thư mục và file nào?</a:t>
             </a:r>
           </a:p>
           <a:p>
@@ -11849,7 +11849,7 @@
                 <a:ea typeface="Segoe UI"/>
                 <a:cs typeface="Segoe UI"/>
               </a:rPr>
-              <a:t> Đổi cấu trúc bảng xong site vẫn báo lỗi cột?</a:t>
+              <a:t> Đổi cấu trúc bảng xong mà site vẫn báo lỗi cột thì làm gì?</a:t>
             </a:r>
           </a:p>
         </p:txBody>
